--- a/_entregables/presentaciones/Modulo02_sintesis.pptx
+++ b/_entregables/presentaciones/Modulo02_sintesis.pptx
@@ -3534,7 +3534,7 @@
         <p:spPr>
           <a:xfrm>
             <a:off x="685800" y="1417320"/>
-            <a:ext cx="2133600" cy="822960"/>
+            <a:ext cx="2133600" cy="868680"/>
           </a:xfrm>
           <a:prstGeom prst="rect">
             <a:avLst/>
@@ -3572,8 +3572,8 @@
         </p:nvSpPr>
         <p:spPr>
           <a:xfrm>
-            <a:off x="685800" y="2286000"/>
-            <a:ext cx="2133600" cy="1920240"/>
+            <a:off x="685800" y="2423160"/>
+            <a:ext cx="2133600" cy="1783080"/>
           </a:xfrm>
           <a:prstGeom prst="rect">
             <a:avLst/>
@@ -3637,7 +3637,7 @@
         <p:spPr>
           <a:xfrm>
             <a:off x="3505200" y="1417320"/>
-            <a:ext cx="2133600" cy="822960"/>
+            <a:ext cx="2133600" cy="868680"/>
           </a:xfrm>
           <a:prstGeom prst="rect">
             <a:avLst/>
@@ -3675,8 +3675,8 @@
         </p:nvSpPr>
         <p:spPr>
           <a:xfrm>
-            <a:off x="3505200" y="2286000"/>
-            <a:ext cx="2133600" cy="1920240"/>
+            <a:off x="3505200" y="2423160"/>
+            <a:ext cx="2133600" cy="1783080"/>
           </a:xfrm>
           <a:prstGeom prst="rect">
             <a:avLst/>
@@ -3740,7 +3740,7 @@
         <p:spPr>
           <a:xfrm>
             <a:off x="6324600" y="1417320"/>
-            <a:ext cx="2133600" cy="822960"/>
+            <a:ext cx="2133600" cy="868680"/>
           </a:xfrm>
           <a:prstGeom prst="rect">
             <a:avLst/>
@@ -3756,7 +3756,7 @@
               <a:buNone/>
             </a:pPr>
             <a:r>
-              <a:rPr lang="en-US" sz="2200" b="1" dirty="0">
+              <a:rPr lang="en-US" sz="1700" b="1" dirty="0">
                 <a:solidFill>
                   <a:srgbClr val="0B3C49"/>
                 </a:solidFill>
@@ -3766,7 +3766,7 @@
               </a:rPr>
               <a:t>Orientada por el mercado</a:t>
             </a:r>
-            <a:endParaRPr lang="en-US" sz="2200" dirty="0"/>
+            <a:endParaRPr lang="en-US" sz="1700" dirty="0"/>
           </a:p>
         </p:txBody>
       </p:sp>
@@ -3778,8 +3778,8 @@
         </p:nvSpPr>
         <p:spPr>
           <a:xfrm>
-            <a:off x="6324600" y="2286000"/>
-            <a:ext cx="2133600" cy="1920240"/>
+            <a:off x="6324600" y="2423160"/>
+            <a:ext cx="2133600" cy="1783080"/>
           </a:xfrm>
           <a:prstGeom prst="rect">
             <a:avLst/>
